--- a/examples/03_luxury_horlogerie/Presentation.pptx
+++ b/examples/03_luxury_horlogerie/Presentation.pptx
@@ -7,11 +7,9 @@
   <p:sldIdLst>
     <p:sldId id="256" r:id="rId2"/>
     <p:sldId id="257" r:id="rId3"/>
-    <p:sldId id="258" r:id="rId4"/>
-    <p:sldId id="259" r:id="rId5"/>
   </p:sldIdLst>
   <p:notesMasterIdLst>
-    <p:notesMasterId r:id="rId6"/>
+    <p:notesMasterId r:id="rId4"/>
   </p:notesMasterIdLst>
   <p:sldSz cx="12192000" cy="6858000"/>
   <p:notesSz cx="6858000" cy="12192000"/>
@@ -505,8 +503,8 @@
           <a:p>
             <a:r>
               <a:rPr lang="en-US" dirty="0"/>
-              <a:t>1. Hero
-note: [오프닝] 180년 브랜드 유산과 디지털 고객 경험의 융합 전략을 발표합니다.</a:t>
+              <a:t>Slide 1: Haute Minimal Cover
+note: 180년 전통의 제네바 워치메이킹 메종의 헤리티지 키노트입니다.</a:t>
             </a:r>
             <a:endParaRPr lang="en-US" dirty="0"/>
           </a:p>
@@ -594,8 +592,8 @@
           <a:p>
             <a:r>
               <a:rPr lang="en-US" dirty="0"/>
-              <a:t>2. Pillars
-note: [핵심 가치] 장인정신, 영구 보증, 프라이빗 살롱의 3대 가치를 계승합니다.</a:t>
+              <a:t>Slide 2: Asymmetric Editorial Quote &amp; 2 Columns
+note: 수작업 피니싱과 디지털 보증서의 조화를 강조하는 에디토리얼 슬라이드입니다.</a:t>
             </a:r>
             <a:endParaRPr lang="en-US" dirty="0"/>
           </a:p>
@@ -619,184 +617,6 @@
             <a:fld id="{F7021451-1387-4CA6-816F-3879F97B5CBC}" type="slidenum">
               <a:rPr lang="en-US"/>
               <a:t>2</a:t>
-            </a:fld>
-            <a:endParaRPr lang="en-US"/>
-          </a:p>
-        </p:txBody>
-      </p:sp>
-    </p:spTree>
-    <p:extLst>
-      <p:ext uri="{BB962C8B-B14F-4D97-AF65-F5344CB8AC3E}">
-        <p14:creationId xmlns:p14="http://schemas.microsoft.com/office/powerpoint/2010/main" val="1024086991"/>
-      </p:ext>
-    </p:extLst>
-  </p:cSld>
-  <p:clrMapOvr>
-    <a:masterClrMapping/>
-  </p:clrMapOvr>
-</p:notes>
-</file>
-
-<file path=ppt/notesSlides/notesSlide3.xml><?xml version="1.0" encoding="utf-8"?>
-<p:notes xmlns:a="http://schemas.openxmlformats.org/drawingml/2006/main" xmlns:r="http://schemas.openxmlformats.org/officeDocument/2006/relationships" xmlns:p="http://schemas.openxmlformats.org/presentationml/2006/main">
-  <p:cSld>
-    <p:spTree>
-      <p:nvGrpSpPr>
-        <p:cNvPr id="1" name=""/>
-        <p:cNvGrpSpPr/>
-        <p:nvPr/>
-      </p:nvGrpSpPr>
-      <p:grpSpPr>
-        <a:xfrm>
-          <a:off x="0" y="0"/>
-          <a:ext cx="0" cy="0"/>
-          <a:chOff x="0" y="0"/>
-          <a:chExt cx="0" cy="0"/>
-        </a:xfrm>
-      </p:grpSpPr>
-      <p:sp>
-        <p:nvSpPr>
-          <p:cNvPr id="2" name="Slide Image Placeholder 1"/>
-          <p:cNvSpPr>
-            <a:spLocks noGrp="1" noRot="1" noChangeAspect="1"/>
-          </p:cNvSpPr>
-          <p:nvPr>
-            <p:ph type="sldImg"/>
-          </p:nvPr>
-        </p:nvSpPr>
-        <p:spPr/>
-      </p:sp>
-      <p:sp>
-        <p:nvSpPr>
-          <p:cNvPr id="3" name="Notes Placeholder 2"/>
-          <p:cNvSpPr>
-            <a:spLocks noGrp="1"/>
-          </p:cNvSpPr>
-          <p:nvPr>
-            <p:ph type="body" idx="1"/>
-          </p:nvPr>
-        </p:nvSpPr>
-        <p:spPr/>
-        <p:txBody>
-          <a:bodyPr/>
-          <a:lstStyle/>
-          <a:p>
-            <a:r>
-              <a:rPr lang="en-US" dirty="0"/>
-              <a:t>3. Big Stats
-note: [지표] 96.4%의 재구매율과 180년의 무브먼트 역사를 보유하고 있습니다.</a:t>
-            </a:r>
-            <a:endParaRPr lang="en-US" dirty="0"/>
-          </a:p>
-        </p:txBody>
-      </p:sp>
-      <p:sp>
-        <p:nvSpPr>
-          <p:cNvPr id="4" name="Slide Number Placeholder 3"/>
-          <p:cNvSpPr>
-            <a:spLocks noGrp="1"/>
-          </p:cNvSpPr>
-          <p:nvPr>
-            <p:ph type="sldNum" sz="quarter" idx="10"/>
-          </p:nvPr>
-        </p:nvSpPr>
-        <p:spPr/>
-        <p:txBody>
-          <a:bodyPr/>
-          <a:lstStyle/>
-          <a:p>
-            <a:fld id="{F7021451-1387-4CA6-816F-3879F97B5CBC}" type="slidenum">
-              <a:rPr lang="en-US"/>
-              <a:t>3</a:t>
-            </a:fld>
-            <a:endParaRPr lang="en-US"/>
-          </a:p>
-        </p:txBody>
-      </p:sp>
-    </p:spTree>
-    <p:extLst>
-      <p:ext uri="{BB962C8B-B14F-4D97-AF65-F5344CB8AC3E}">
-        <p14:creationId xmlns:p14="http://schemas.microsoft.com/office/powerpoint/2010/main" val="1024086991"/>
-      </p:ext>
-    </p:extLst>
-  </p:cSld>
-  <p:clrMapOvr>
-    <a:masterClrMapping/>
-  </p:clrMapOvr>
-</p:notes>
-</file>
-
-<file path=ppt/notesSlides/notesSlide4.xml><?xml version="1.0" encoding="utf-8"?>
-<p:notes xmlns:a="http://schemas.openxmlformats.org/drawingml/2006/main" xmlns:r="http://schemas.openxmlformats.org/officeDocument/2006/relationships" xmlns:p="http://schemas.openxmlformats.org/presentationml/2006/main">
-  <p:cSld>
-    <p:spTree>
-      <p:nvGrpSpPr>
-        <p:cNvPr id="1" name=""/>
-        <p:cNvGrpSpPr/>
-        <p:nvPr/>
-      </p:nvGrpSpPr>
-      <p:grpSpPr>
-        <a:xfrm>
-          <a:off x="0" y="0"/>
-          <a:ext cx="0" cy="0"/>
-          <a:chOff x="0" y="0"/>
-          <a:chExt cx="0" cy="0"/>
-        </a:xfrm>
-      </p:grpSpPr>
-      <p:sp>
-        <p:nvSpPr>
-          <p:cNvPr id="2" name="Slide Image Placeholder 1"/>
-          <p:cNvSpPr>
-            <a:spLocks noGrp="1" noRot="1" noChangeAspect="1"/>
-          </p:cNvSpPr>
-          <p:nvPr>
-            <p:ph type="sldImg"/>
-          </p:nvPr>
-        </p:nvSpPr>
-        <p:spPr/>
-      </p:sp>
-      <p:sp>
-        <p:nvSpPr>
-          <p:cNvPr id="3" name="Notes Placeholder 2"/>
-          <p:cNvSpPr>
-            <a:spLocks noGrp="1"/>
-          </p:cNvSpPr>
-          <p:nvPr>
-            <p:ph type="body" idx="1"/>
-          </p:nvPr>
-        </p:nvSpPr>
-        <p:spPr/>
-        <p:txBody>
-          <a:bodyPr/>
-          <a:lstStyle/>
-          <a:p>
-            <a:r>
-              <a:rPr lang="en-US" dirty="0"/>
-              <a:t>4. Closing
-note: [마무리] 경청해 주셔서 감사합니다. 메종의 미래에 대한 질문을 받겠습니다.</a:t>
-            </a:r>
-            <a:endParaRPr lang="en-US" dirty="0"/>
-          </a:p>
-        </p:txBody>
-      </p:sp>
-      <p:sp>
-        <p:nvSpPr>
-          <p:cNvPr id="4" name="Slide Number Placeholder 3"/>
-          <p:cNvSpPr>
-            <a:spLocks noGrp="1"/>
-          </p:cNvSpPr>
-          <p:nvPr>
-            <p:ph type="sldNum" sz="quarter" idx="10"/>
-          </p:nvPr>
-        </p:nvSpPr>
-        <p:spPr/>
-        <p:txBody>
-          <a:bodyPr/>
-          <a:lstStyle/>
-          <a:p>
-            <a:fld id="{F7021451-1387-4CA6-816F-3879F97B5CBC}" type="slidenum">
-              <a:rPr lang="en-US"/>
-              <a:t>4</a:t>
             </a:fld>
             <a:endParaRPr lang="en-US"/>
           </a:p>
@@ -1164,84 +984,6 @@
 <file path=ppt/slides/slide2.xml><?xml version="1.0" encoding="utf-8"?>
 <p:sld xmlns:a="http://schemas.openxmlformats.org/drawingml/2006/main" xmlns:r="http://schemas.openxmlformats.org/officeDocument/2006/relationships" xmlns:p="http://schemas.openxmlformats.org/presentationml/2006/main">
   <p:cSld name="Slide 2">
-    <p:bg>
-      <p:bgPr>
-        <a:blipFill dpi="0" rotWithShape="1">
-          <a:blip r:embed="rId1">
-            <a:lum/>
-          </a:blip>
-          <a:srcRect/>
-          <a:stretch>
-            <a:fillRect/>
-          </a:stretch>
-        </a:blipFill>
-        <a:effectLst/>
-      </p:bgPr>
-    </p:bg>
-    <p:spTree>
-      <p:nvGrpSpPr>
-        <p:cNvPr id="1" name=""/>
-        <p:cNvGrpSpPr/>
-        <p:nvPr/>
-      </p:nvGrpSpPr>
-      <p:grpSpPr>
-        <a:xfrm>
-          <a:off x="0" y="0"/>
-          <a:ext cx="0" cy="0"/>
-          <a:chOff x="0" y="0"/>
-          <a:chExt cx="0" cy="0"/>
-        </a:xfrm>
-      </p:grpSpPr>
-    </p:spTree>
-  </p:cSld>
-  <p:clrMapOvr>
-    <a:masterClrMapping/>
-  </p:clrMapOvr>
-</p:sld>
-</file>
-
-<file path=ppt/slides/slide3.xml><?xml version="1.0" encoding="utf-8"?>
-<p:sld xmlns:a="http://schemas.openxmlformats.org/drawingml/2006/main" xmlns:r="http://schemas.openxmlformats.org/officeDocument/2006/relationships" xmlns:p="http://schemas.openxmlformats.org/presentationml/2006/main">
-  <p:cSld name="Slide 3">
-    <p:bg>
-      <p:bgPr>
-        <a:blipFill dpi="0" rotWithShape="1">
-          <a:blip r:embed="rId1">
-            <a:lum/>
-          </a:blip>
-          <a:srcRect/>
-          <a:stretch>
-            <a:fillRect/>
-          </a:stretch>
-        </a:blipFill>
-        <a:effectLst/>
-      </p:bgPr>
-    </p:bg>
-    <p:spTree>
-      <p:nvGrpSpPr>
-        <p:cNvPr id="1" name=""/>
-        <p:cNvGrpSpPr/>
-        <p:nvPr/>
-      </p:nvGrpSpPr>
-      <p:grpSpPr>
-        <a:xfrm>
-          <a:off x="0" y="0"/>
-          <a:ext cx="0" cy="0"/>
-          <a:chOff x="0" y="0"/>
-          <a:chExt cx="0" cy="0"/>
-        </a:xfrm>
-      </p:grpSpPr>
-    </p:spTree>
-  </p:cSld>
-  <p:clrMapOvr>
-    <a:masterClrMapping/>
-  </p:clrMapOvr>
-</p:sld>
-</file>
-
-<file path=ppt/slides/slide4.xml><?xml version="1.0" encoding="utf-8"?>
-<p:sld xmlns:a="http://schemas.openxmlformats.org/drawingml/2006/main" xmlns:r="http://schemas.openxmlformats.org/officeDocument/2006/relationships" xmlns:p="http://schemas.openxmlformats.org/presentationml/2006/main">
-  <p:cSld name="Slide 4">
     <p:bg>
       <p:bgPr>
         <a:blipFill dpi="0" rotWithShape="1">

--- a/examples/03_luxury_horlogerie/Presentation.pptx
+++ b/examples/03_luxury_horlogerie/Presentation.pptx
@@ -503,8 +503,7 @@
           <a:p>
             <a:r>
               <a:rPr lang="en-US" dirty="0"/>
-              <a:t>Slide 1: Haute Minimal Cover
-note: 180년 전통의 제네바 워치메이킹 메종의 헤리티지 키노트입니다.</a:t>
+              <a:t>180년 전통의 제네바 워치메이킹 메종의 헤리티지 키노트입니다.</a:t>
             </a:r>
             <a:endParaRPr lang="en-US" dirty="0"/>
           </a:p>
@@ -592,8 +591,7 @@
           <a:p>
             <a:r>
               <a:rPr lang="en-US" dirty="0"/>
-              <a:t>Slide 2: Asymmetric Editorial Quote &amp; 2 Columns
-note: 수작업 피니싱과 디지털 보증서의 조화를 강조하는 에디토리얼 슬라이드입니다.</a:t>
+              <a:t>수작업 피니싱과 디지털 보증서의 조화를 강조하는 에디토리얼 슬라이드입니다.</a:t>
             </a:r>
             <a:endParaRPr lang="en-US" dirty="0"/>
           </a:p>
@@ -947,16 +945,9 @@
   <p:cSld name="Slide 1">
     <p:bg>
       <p:bgPr>
-        <a:blipFill dpi="0" rotWithShape="1">
-          <a:blip r:embed="rId1">
-            <a:lum/>
-          </a:blip>
-          <a:srcRect/>
-          <a:stretch>
-            <a:fillRect/>
-          </a:stretch>
-        </a:blipFill>
-        <a:effectLst/>
+        <a:solidFill>
+          <a:srgbClr val="0D0D0E"/>
+        </a:solidFill>
       </p:bgPr>
     </p:bg>
     <p:spTree>
@@ -973,6 +964,306 @@
           <a:chExt cx="0" cy="0"/>
         </a:xfrm>
       </p:grpSpPr>
+      <p:sp>
+        <p:nvSpPr>
+          <p:cNvPr id="2" name="Text 0"/>
+          <p:cNvSpPr txBox="1"/>
+          <p:nvPr/>
+        </p:nvSpPr>
+        <p:spPr>
+          <a:xfrm>
+            <a:off x="647670" y="474756"/>
+            <a:ext cx="11746200" cy="298369"/>
+          </a:xfrm>
+          <a:prstGeom prst="rect">
+            <a:avLst/>
+          </a:prstGeom>
+          <a:noFill/>
+          <a:ln/>
+        </p:spPr>
+        <p:txBody>
+          <a:bodyPr wrap="none" lIns="0" tIns="0" rIns="0" bIns="0" rtlCol="0" anchor="t"/>
+          <a:lstStyle/>
+          <a:p>
+            <a:pPr algn="l" indent="0" marL="0">
+              <a:lnSpc>
+                <a:spcPts val="2349"/>
+              </a:lnSpc>
+              <a:buNone/>
+            </a:pPr>
+            <a:r>
+              <a:rPr lang="en-US" sz="1566" b="1" spc="313" kern="0" dirty="0">
+                <a:solidFill>
+                  <a:srgbClr val="E5C07B"/>
+                </a:solidFill>
+                <a:latin typeface="Malgun Gothic" pitchFamily="34" charset="0"/>
+                <a:ea typeface="Malgun Gothic" pitchFamily="34" charset="-122"/>
+                <a:cs typeface="Malgun Gothic" pitchFamily="34" charset="-120"/>
+              </a:rPr>
+              <a:t>GENÈVE • MAISON DE HAUTE HORLOGERIE</a:t>
+            </a:r>
+            <a:endParaRPr lang="en-US" sz="1566" dirty="0"/>
+          </a:p>
+        </p:txBody>
+      </p:sp>
+      <p:sp>
+        <p:nvSpPr>
+          <p:cNvPr id="3" name="Shape 1"/>
+          <p:cNvSpPr/>
+          <p:nvPr/>
+        </p:nvSpPr>
+        <p:spPr>
+          <a:xfrm>
+            <a:off x="666780" y="926836"/>
+            <a:ext cx="10858500" cy="9510"/>
+          </a:xfrm>
+          <a:prstGeom prst="rect">
+            <a:avLst/>
+          </a:prstGeom>
+          <a:solidFill>
+            <a:srgbClr val="E5C07B">
+              <a:alpha val="30000"/>
+            </a:srgbClr>
+          </a:solidFill>
+          <a:ln/>
+        </p:spPr>
+      </p:sp>
+      <p:sp>
+        <p:nvSpPr>
+          <p:cNvPr id="4" name="Text 2"/>
+          <p:cNvSpPr txBox="1"/>
+          <p:nvPr/>
+        </p:nvSpPr>
+        <p:spPr>
+          <a:xfrm>
+            <a:off x="647670" y="1009040"/>
+            <a:ext cx="10896630" cy="2032986"/>
+          </a:xfrm>
+          <a:prstGeom prst="rect">
+            <a:avLst/>
+          </a:prstGeom>
+          <a:noFill/>
+          <a:ln/>
+        </p:spPr>
+        <p:txBody>
+          <a:bodyPr wrap="square" lIns="0" tIns="0" rIns="0" bIns="0" rtlCol="0" anchor="t"/>
+          <a:lstStyle/>
+          <a:p>
+            <a:pPr algn="l" indent="0" marL="0">
+              <a:lnSpc>
+                <a:spcPts val="8004"/>
+              </a:lnSpc>
+              <a:buNone/>
+            </a:pPr>
+            <a:r>
+              <a:rPr lang="en-US" sz="6960" b="1" spc="139" kern="0" dirty="0">
+                <a:solidFill>
+                  <a:srgbClr val="FFFFFF"/>
+                </a:solidFill>
+                <a:latin typeface="Georgia" pitchFamily="34" charset="0"/>
+                <a:ea typeface="Georgia" pitchFamily="34" charset="-122"/>
+                <a:cs typeface="Georgia" pitchFamily="34" charset="-120"/>
+              </a:rPr>
+              <a:t>L’Art de la Précision</a:t>
+            </a:r>
+            <a:pPr algn="l" indent="0" marL="0">
+              <a:lnSpc>
+                <a:spcPts val="8004"/>
+              </a:lnSpc>
+              <a:buNone/>
+            </a:pPr>
+            <a:endParaRPr lang="en-US" sz="6960" dirty="0"/>
+          </a:p>
+          <a:p>
+            <a:pPr algn="l" indent="0" marL="0">
+              <a:lnSpc>
+                <a:spcPts val="8004"/>
+              </a:lnSpc>
+              <a:buNone/>
+            </a:pPr>
+            <a:r>
+              <a:rPr lang="en-US" sz="6960" b="1" spc="139" kern="0" dirty="0">
+                <a:solidFill>
+                  <a:srgbClr val="FFFFFF"/>
+                </a:solidFill>
+                <a:latin typeface="Georgia" pitchFamily="34" charset="0"/>
+                <a:ea typeface="Georgia" pitchFamily="34" charset="-122"/>
+                <a:cs typeface="Georgia" pitchFamily="34" charset="-120"/>
+              </a:rPr>
+              <a:t> </a:t>
+            </a:r>
+            <a:endParaRPr lang="en-US" sz="6960" dirty="0"/>
+          </a:p>
+          <a:p>
+            <a:pPr algn="l" indent="0" marL="0">
+              <a:lnSpc>
+                <a:spcPts val="8004"/>
+              </a:lnSpc>
+              <a:buNone/>
+            </a:pPr>
+            <a:r>
+              <a:rPr lang="en-US" sz="3120" b="1" i="1" spc="139" kern="0" dirty="0">
+                <a:solidFill>
+                  <a:srgbClr val="E5C07B"/>
+                </a:solidFill>
+                <a:latin typeface="Georgia" pitchFamily="34" charset="0"/>
+                <a:ea typeface="Georgia" pitchFamily="34" charset="-122"/>
+                <a:cs typeface="Georgia" pitchFamily="34" charset="-120"/>
+              </a:rPr>
+              <a:t>180 Years of Timeless Mastery</a:t>
+            </a:r>
+            <a:endParaRPr lang="en-US" sz="6960" dirty="0"/>
+          </a:p>
+        </p:txBody>
+      </p:sp>
+      <p:sp>
+        <p:nvSpPr>
+          <p:cNvPr id="5" name="Text 3"/>
+          <p:cNvSpPr txBox="1"/>
+          <p:nvPr/>
+        </p:nvSpPr>
+        <p:spPr>
+          <a:xfrm>
+            <a:off x="647670" y="3534796"/>
+            <a:ext cx="6705570" cy="256032"/>
+          </a:xfrm>
+          <a:prstGeom prst="rect">
+            <a:avLst/>
+          </a:prstGeom>
+          <a:noFill/>
+          <a:ln/>
+        </p:spPr>
+        <p:txBody>
+          <a:bodyPr wrap="none" lIns="0" tIns="0" rIns="0" bIns="0" rtlCol="0" anchor="t"/>
+          <a:lstStyle/>
+          <a:p>
+            <a:pPr algn="l" indent="0" marL="0">
+              <a:lnSpc>
+                <a:spcPts val="2016"/>
+              </a:lnSpc>
+              <a:buNone/>
+            </a:pPr>
+            <a:r>
+              <a:rPr lang="en-US" sz="1260" spc="-43" kern="0" dirty="0">
+                <a:solidFill>
+                  <a:srgbClr val="A1A1AA"/>
+                </a:solidFill>
+                <a:latin typeface="Malgun Gothic" pitchFamily="34" charset="0"/>
+                <a:ea typeface="Malgun Gothic" pitchFamily="34" charset="-122"/>
+                <a:cs typeface="Malgun Gothic" pitchFamily="34" charset="-120"/>
+              </a:rPr>
+              <a:t>기계식 무브먼트의 영원한 장인정신과 디지털 시대의 헤리티지 보존</a:t>
+            </a:r>
+            <a:endParaRPr lang="en-US" sz="1260" dirty="0"/>
+          </a:p>
+        </p:txBody>
+      </p:sp>
+      <p:sp>
+        <p:nvSpPr>
+          <p:cNvPr id="6" name="Shape 4"/>
+          <p:cNvSpPr/>
+          <p:nvPr/>
+        </p:nvSpPr>
+        <p:spPr>
+          <a:xfrm>
+            <a:off x="666780" y="6025622"/>
+            <a:ext cx="10858500" cy="9510"/>
+          </a:xfrm>
+          <a:prstGeom prst="rect">
+            <a:avLst/>
+          </a:prstGeom>
+          <a:solidFill>
+            <a:srgbClr val="E5C07B">
+              <a:alpha val="20000"/>
+            </a:srgbClr>
+          </a:solidFill>
+          <a:ln/>
+        </p:spPr>
+      </p:sp>
+      <p:sp>
+        <p:nvSpPr>
+          <p:cNvPr id="7" name="Text 5"/>
+          <p:cNvSpPr txBox="1"/>
+          <p:nvPr/>
+        </p:nvSpPr>
+        <p:spPr>
+          <a:xfrm>
+            <a:off x="647670" y="6205576"/>
+            <a:ext cx="2414473" cy="171450"/>
+          </a:xfrm>
+          <a:prstGeom prst="rect">
+            <a:avLst/>
+          </a:prstGeom>
+          <a:noFill/>
+          <a:ln/>
+        </p:spPr>
+        <p:txBody>
+          <a:bodyPr wrap="none" lIns="0" tIns="0" rIns="0" bIns="0" rtlCol="0" anchor="t"/>
+          <a:lstStyle/>
+          <a:p>
+            <a:pPr algn="l" indent="0" marL="0">
+              <a:lnSpc>
+                <a:spcPts val="1350"/>
+              </a:lnSpc>
+              <a:buNone/>
+            </a:pPr>
+            <a:r>
+              <a:rPr lang="en-US" sz="900" spc="-43" kern="0" dirty="0">
+                <a:solidFill>
+                  <a:srgbClr val="71717A"/>
+                </a:solidFill>
+                <a:latin typeface="Malgun Gothic" pitchFamily="34" charset="0"/>
+                <a:ea typeface="Malgun Gothic" pitchFamily="34" charset="-122"/>
+                <a:cs typeface="Malgun Gothic" pitchFamily="34" charset="-120"/>
+              </a:rPr>
+              <a:t>SWISS HANDMADE • LIMITED 500 PIECES / YEAR</a:t>
+            </a:r>
+            <a:endParaRPr lang="en-US" sz="900" dirty="0"/>
+          </a:p>
+        </p:txBody>
+      </p:sp>
+      <p:sp>
+        <p:nvSpPr>
+          <p:cNvPr id="8" name="Text 6"/>
+          <p:cNvSpPr txBox="1"/>
+          <p:nvPr/>
+        </p:nvSpPr>
+        <p:spPr>
+          <a:xfrm>
+            <a:off x="10514868" y="6185642"/>
+            <a:ext cx="1089690" cy="194310"/>
+          </a:xfrm>
+          <a:prstGeom prst="rect">
+            <a:avLst/>
+          </a:prstGeom>
+          <a:noFill/>
+          <a:ln/>
+        </p:spPr>
+        <p:txBody>
+          <a:bodyPr wrap="none" lIns="0" tIns="0" rIns="0" bIns="0" rtlCol="0" anchor="t"/>
+          <a:lstStyle/>
+          <a:p>
+            <a:pPr algn="l" indent="0" marL="0">
+              <a:lnSpc>
+                <a:spcPts val="1530"/>
+              </a:lnSpc>
+              <a:buNone/>
+            </a:pPr>
+            <a:r>
+              <a:rPr lang="en-US" sz="1020" b="1" spc="-43" kern="0" dirty="0">
+                <a:solidFill>
+                  <a:srgbClr val="E5C07B"/>
+                </a:solidFill>
+                <a:latin typeface="Malgun Gothic" pitchFamily="34" charset="0"/>
+                <a:ea typeface="Malgun Gothic" pitchFamily="34" charset="-122"/>
+                <a:cs typeface="Malgun Gothic" pitchFamily="34" charset="-120"/>
+              </a:rPr>
+              <a:t>ESTABLISHED 1846</a:t>
+            </a:r>
+            <a:endParaRPr lang="en-US" sz="1020" dirty="0"/>
+          </a:p>
+        </p:txBody>
+      </p:sp>
     </p:spTree>
   </p:cSld>
   <p:clrMapOvr>
@@ -986,16 +1277,9 @@
   <p:cSld name="Slide 2">
     <p:bg>
       <p:bgPr>
-        <a:blipFill dpi="0" rotWithShape="1">
-          <a:blip r:embed="rId1">
-            <a:lum/>
-          </a:blip>
-          <a:srcRect/>
-          <a:stretch>
-            <a:fillRect/>
-          </a:stretch>
-        </a:blipFill>
-        <a:effectLst/>
+        <a:solidFill>
+          <a:srgbClr val="0D0D0E"/>
+        </a:solidFill>
       </p:bgPr>
     </p:bg>
     <p:spTree>
@@ -1012,6 +1296,386 @@
           <a:chExt cx="0" cy="0"/>
         </a:xfrm>
       </p:grpSpPr>
+      <p:sp>
+        <p:nvSpPr>
+          <p:cNvPr id="2" name="Text 0"/>
+          <p:cNvSpPr txBox="1"/>
+          <p:nvPr/>
+        </p:nvSpPr>
+        <p:spPr>
+          <a:xfrm>
+            <a:off x="647670" y="474756"/>
+            <a:ext cx="11746200" cy="298369"/>
+          </a:xfrm>
+          <a:prstGeom prst="rect">
+            <a:avLst/>
+          </a:prstGeom>
+          <a:noFill/>
+          <a:ln/>
+        </p:spPr>
+        <p:txBody>
+          <a:bodyPr wrap="none" lIns="0" tIns="0" rIns="0" bIns="0" rtlCol="0" anchor="t"/>
+          <a:lstStyle/>
+          <a:p>
+            <a:pPr algn="l" indent="0" marL="0">
+              <a:lnSpc>
+                <a:spcPts val="2349"/>
+              </a:lnSpc>
+              <a:buNone/>
+            </a:pPr>
+            <a:r>
+              <a:rPr lang="en-US" sz="1566" b="1" spc="313" kern="0" dirty="0">
+                <a:solidFill>
+                  <a:srgbClr val="E5C07B"/>
+                </a:solidFill>
+                <a:latin typeface="Malgun Gothic" pitchFamily="34" charset="0"/>
+                <a:ea typeface="Malgun Gothic" pitchFamily="34" charset="-122"/>
+                <a:cs typeface="Malgun Gothic" pitchFamily="34" charset="-120"/>
+              </a:rPr>
+              <a:t>PHILOSOPHIE &amp; SAVOIR-FAIRE</a:t>
+            </a:r>
+            <a:endParaRPr lang="en-US" sz="1566" dirty="0"/>
+          </a:p>
+        </p:txBody>
+      </p:sp>
+      <p:sp>
+        <p:nvSpPr>
+          <p:cNvPr id="3" name="Shape 1"/>
+          <p:cNvSpPr/>
+          <p:nvPr/>
+        </p:nvSpPr>
+        <p:spPr>
+          <a:xfrm>
+            <a:off x="666780" y="926836"/>
+            <a:ext cx="10858500" cy="9510"/>
+          </a:xfrm>
+          <a:prstGeom prst="rect">
+            <a:avLst/>
+          </a:prstGeom>
+          <a:solidFill>
+            <a:srgbClr val="E5C07B">
+              <a:alpha val="30000"/>
+            </a:srgbClr>
+          </a:solidFill>
+          <a:ln/>
+        </p:spPr>
+      </p:sp>
+      <p:sp>
+        <p:nvSpPr>
+          <p:cNvPr id="4" name="Text 2"/>
+          <p:cNvSpPr txBox="1"/>
+          <p:nvPr/>
+        </p:nvSpPr>
+        <p:spPr>
+          <a:xfrm>
+            <a:off x="647670" y="1754002"/>
+            <a:ext cx="6278819" cy="3449391"/>
+          </a:xfrm>
+          <a:prstGeom prst="rect">
+            <a:avLst/>
+          </a:prstGeom>
+          <a:noFill/>
+          <a:ln/>
+        </p:spPr>
+        <p:txBody>
+          <a:bodyPr wrap="square" lIns="0" tIns="0" rIns="0" bIns="0" rtlCol="0" anchor="t"/>
+          <a:lstStyle/>
+          <a:p>
+            <a:pPr algn="l" indent="0" marL="0">
+              <a:lnSpc>
+                <a:spcPts val="5432"/>
+              </a:lnSpc>
+              <a:buNone/>
+            </a:pPr>
+            <a:r>
+              <a:rPr lang="en-US" sz="4024" i="1" spc="-43" kern="0" dirty="0">
+                <a:solidFill>
+                  <a:srgbClr val="F8F6F0"/>
+                </a:solidFill>
+                <a:latin typeface="Georgia" pitchFamily="34" charset="0"/>
+                <a:ea typeface="Georgia" pitchFamily="34" charset="-122"/>
+                <a:cs typeface="Georgia" pitchFamily="34" charset="-120"/>
+              </a:rPr>
+              <a:t>“우리는 단순히 시간을 측정하는 도구를 만드는 것이 아니라, 세대를 넘어 이어질 예술적 영혼을 조각합니다.”</a:t>
+            </a:r>
+            <a:endParaRPr lang="en-US" sz="4024" dirty="0"/>
+          </a:p>
+        </p:txBody>
+      </p:sp>
+      <p:sp>
+        <p:nvSpPr>
+          <p:cNvPr id="5" name="Text 3"/>
+          <p:cNvSpPr txBox="1"/>
+          <p:nvPr/>
+        </p:nvSpPr>
+        <p:spPr>
+          <a:xfrm>
+            <a:off x="647670" y="5356647"/>
+            <a:ext cx="6758970" cy="182880"/>
+          </a:xfrm>
+          <a:prstGeom prst="rect">
+            <a:avLst/>
+          </a:prstGeom>
+          <a:noFill/>
+          <a:ln/>
+        </p:spPr>
+        <p:txBody>
+          <a:bodyPr wrap="none" lIns="0" tIns="0" rIns="0" bIns="0" rtlCol="0" anchor="t"/>
+          <a:lstStyle/>
+          <a:p>
+            <a:pPr algn="l" indent="0" marL="0">
+              <a:lnSpc>
+                <a:spcPts val="1440"/>
+              </a:lnSpc>
+              <a:buNone/>
+            </a:pPr>
+            <a:r>
+              <a:rPr lang="en-US" sz="960" spc="-43" kern="0" dirty="0">
+                <a:solidFill>
+                  <a:srgbClr val="E5C07B"/>
+                </a:solidFill>
+                <a:latin typeface="Malgun Gothic" pitchFamily="34" charset="0"/>
+                <a:ea typeface="Malgun Gothic" pitchFamily="34" charset="-122"/>
+                <a:cs typeface="Malgun Gothic" pitchFamily="34" charset="-120"/>
+              </a:rPr>
+              <a:t>— Master Watchmaker, Atelier Genève</a:t>
+            </a:r>
+            <a:endParaRPr lang="en-US" sz="960" dirty="0"/>
+          </a:p>
+        </p:txBody>
+      </p:sp>
+      <p:sp>
+        <p:nvSpPr>
+          <p:cNvPr id="6" name="Shape 4"/>
+          <p:cNvSpPr/>
+          <p:nvPr/>
+        </p:nvSpPr>
+        <p:spPr>
+          <a:xfrm>
+            <a:off x="7364669" y="3205704"/>
+            <a:ext cx="9510" cy="894466"/>
+          </a:xfrm>
+          <a:prstGeom prst="rect">
+            <a:avLst/>
+          </a:prstGeom>
+          <a:solidFill>
+            <a:srgbClr val="E5C07B">
+              <a:alpha val="25000"/>
+            </a:srgbClr>
+          </a:solidFill>
+          <a:ln/>
+        </p:spPr>
+      </p:sp>
+      <p:sp>
+        <p:nvSpPr>
+          <p:cNvPr id="7" name="Text 5"/>
+          <p:cNvSpPr txBox="1"/>
+          <p:nvPr/>
+        </p:nvSpPr>
+        <p:spPr>
+          <a:xfrm>
+            <a:off x="7659929" y="3204423"/>
+            <a:ext cx="4173047" cy="164592"/>
+          </a:xfrm>
+          <a:prstGeom prst="rect">
+            <a:avLst/>
+          </a:prstGeom>
+          <a:noFill/>
+          <a:ln/>
+        </p:spPr>
+        <p:txBody>
+          <a:bodyPr wrap="none" lIns="0" tIns="0" rIns="0" bIns="0" rtlCol="0" anchor="t"/>
+          <a:lstStyle/>
+          <a:p>
+            <a:pPr algn="l" indent="0" marL="0">
+              <a:lnSpc>
+                <a:spcPts val="1296"/>
+              </a:lnSpc>
+              <a:buNone/>
+            </a:pPr>
+            <a:r>
+              <a:rPr lang="en-US" sz="864" b="1" spc="86" kern="0" dirty="0">
+                <a:solidFill>
+                  <a:srgbClr val="E5C07B"/>
+                </a:solidFill>
+                <a:latin typeface="Malgun Gothic" pitchFamily="34" charset="0"/>
+                <a:ea typeface="Malgun Gothic" pitchFamily="34" charset="-122"/>
+                <a:cs typeface="Malgun Gothic" pitchFamily="34" charset="-120"/>
+              </a:rPr>
+              <a:t>01. 100% HAND FINISHING</a:t>
+            </a:r>
+            <a:endParaRPr lang="en-US" sz="864" dirty="0"/>
+          </a:p>
+        </p:txBody>
+      </p:sp>
+      <p:sp>
+        <p:nvSpPr>
+          <p:cNvPr id="8" name="Text 6"/>
+          <p:cNvSpPr txBox="1"/>
+          <p:nvPr/>
+        </p:nvSpPr>
+        <p:spPr>
+          <a:xfrm>
+            <a:off x="7659929" y="3381268"/>
+            <a:ext cx="4173047" cy="187452"/>
+          </a:xfrm>
+          <a:prstGeom prst="rect">
+            <a:avLst/>
+          </a:prstGeom>
+          <a:noFill/>
+          <a:ln/>
+        </p:spPr>
+        <p:txBody>
+          <a:bodyPr wrap="none" lIns="0" tIns="0" rIns="0" bIns="0" rtlCol="0" anchor="t"/>
+          <a:lstStyle/>
+          <a:p>
+            <a:pPr algn="l" indent="0" marL="0">
+              <a:lnSpc>
+                <a:spcPts val="1476"/>
+              </a:lnSpc>
+              <a:buNone/>
+            </a:pPr>
+            <a:r>
+              <a:rPr lang="en-US" sz="984" spc="-43" kern="0" dirty="0">
+                <a:solidFill>
+                  <a:srgbClr val="D4D4D8"/>
+                </a:solidFill>
+                <a:latin typeface="Malgun Gothic" pitchFamily="34" charset="0"/>
+                <a:ea typeface="Malgun Gothic" pitchFamily="34" charset="-122"/>
+                <a:cs typeface="Malgun Gothic" pitchFamily="34" charset="-120"/>
+              </a:rPr>
+              <a:t>모든 앵글라주와 꼬뜨 드 제네바 패턴을 장인이 수작업 가공</a:t>
+            </a:r>
+            <a:endParaRPr lang="en-US" sz="984" dirty="0"/>
+          </a:p>
+        </p:txBody>
+      </p:sp>
+      <p:sp>
+        <p:nvSpPr>
+          <p:cNvPr id="9" name="Text 7"/>
+          <p:cNvSpPr txBox="1"/>
+          <p:nvPr/>
+        </p:nvSpPr>
+        <p:spPr>
+          <a:xfrm>
+            <a:off x="7659929" y="3727917"/>
+            <a:ext cx="4173047" cy="164592"/>
+          </a:xfrm>
+          <a:prstGeom prst="rect">
+            <a:avLst/>
+          </a:prstGeom>
+          <a:noFill/>
+          <a:ln/>
+        </p:spPr>
+        <p:txBody>
+          <a:bodyPr wrap="none" lIns="0" tIns="0" rIns="0" bIns="0" rtlCol="0" anchor="t"/>
+          <a:lstStyle/>
+          <a:p>
+            <a:pPr algn="l" indent="0" marL="0">
+              <a:lnSpc>
+                <a:spcPts val="1296"/>
+              </a:lnSpc>
+              <a:buNone/>
+            </a:pPr>
+            <a:r>
+              <a:rPr lang="en-US" sz="864" b="1" spc="86" kern="0" dirty="0">
+                <a:solidFill>
+                  <a:srgbClr val="E5C07B"/>
+                </a:solidFill>
+                <a:latin typeface="Malgun Gothic" pitchFamily="34" charset="0"/>
+                <a:ea typeface="Malgun Gothic" pitchFamily="34" charset="-122"/>
+                <a:cs typeface="Malgun Gothic" pitchFamily="34" charset="-120"/>
+              </a:rPr>
+              <a:t>02. ON-CHAIN CERTIFICATE</a:t>
+            </a:r>
+            <a:endParaRPr lang="en-US" sz="864" dirty="0"/>
+          </a:p>
+        </p:txBody>
+      </p:sp>
+      <p:sp>
+        <p:nvSpPr>
+          <p:cNvPr id="10" name="Text 8"/>
+          <p:cNvSpPr txBox="1"/>
+          <p:nvPr/>
+        </p:nvSpPr>
+        <p:spPr>
+          <a:xfrm>
+            <a:off x="7659929" y="3904671"/>
+            <a:ext cx="4173047" cy="187452"/>
+          </a:xfrm>
+          <a:prstGeom prst="rect">
+            <a:avLst/>
+          </a:prstGeom>
+          <a:noFill/>
+          <a:ln/>
+        </p:spPr>
+        <p:txBody>
+          <a:bodyPr wrap="none" lIns="0" tIns="0" rIns="0" bIns="0" rtlCol="0" anchor="t"/>
+          <a:lstStyle/>
+          <a:p>
+            <a:pPr algn="l" indent="0" marL="0">
+              <a:lnSpc>
+                <a:spcPts val="1476"/>
+              </a:lnSpc>
+              <a:buNone/>
+            </a:pPr>
+            <a:r>
+              <a:rPr lang="en-US" sz="984" spc="-43" kern="0" dirty="0">
+                <a:solidFill>
+                  <a:srgbClr val="D4D4D8"/>
+                </a:solidFill>
+                <a:latin typeface="Malgun Gothic" pitchFamily="34" charset="0"/>
+                <a:ea typeface="Malgun Gothic" pitchFamily="34" charset="-122"/>
+                <a:cs typeface="Malgun Gothic" pitchFamily="34" charset="-120"/>
+              </a:rPr>
+              <a:t>영구 소유권 및 오버홀 이력을 분산 원장에 암호화 보증</a:t>
+            </a:r>
+            <a:endParaRPr lang="en-US" sz="984" dirty="0"/>
+          </a:p>
+        </p:txBody>
+      </p:sp>
+      <p:sp>
+        <p:nvSpPr>
+          <p:cNvPr id="11" name="Text 9"/>
+          <p:cNvSpPr txBox="1"/>
+          <p:nvPr/>
+        </p:nvSpPr>
+        <p:spPr>
+          <a:xfrm>
+            <a:off x="647670" y="6215908"/>
+            <a:ext cx="11746200" cy="164592"/>
+          </a:xfrm>
+          <a:prstGeom prst="rect">
+            <a:avLst/>
+          </a:prstGeom>
+          <a:noFill/>
+          <a:ln/>
+        </p:spPr>
+        <p:txBody>
+          <a:bodyPr wrap="none" lIns="0" tIns="0" rIns="0" bIns="0" rtlCol="0" anchor="t"/>
+          <a:lstStyle/>
+          <a:p>
+            <a:pPr algn="l" indent="0" marL="0">
+              <a:lnSpc>
+                <a:spcPts val="1296"/>
+              </a:lnSpc>
+              <a:buNone/>
+            </a:pPr>
+            <a:r>
+              <a:rPr lang="en-US" sz="864" spc="-43" kern="0" dirty="0">
+                <a:solidFill>
+                  <a:srgbClr val="8B8B93"/>
+                </a:solidFill>
+                <a:latin typeface="Malgun Gothic" pitchFamily="34" charset="0"/>
+                <a:ea typeface="Malgun Gothic" pitchFamily="34" charset="-122"/>
+                <a:cs typeface="Malgun Gothic" pitchFamily="34" charset="-120"/>
+              </a:rPr>
+              <a:t>CONFIDENTIAL • FOR PRIVATE VIP COLLECTORS ONLY</a:t>
+            </a:r>
+            <a:endParaRPr lang="en-US" sz="864" dirty="0"/>
+          </a:p>
+        </p:txBody>
+      </p:sp>
     </p:spTree>
   </p:cSld>
   <p:clrMapOvr>
